--- a/data-eng/decks/w3d4s4.pptx
+++ b/data-eng/decks/w3d4s4.pptx
@@ -15,6 +15,7 @@
     <p:sldId id="263" r:id="rId14"/>
     <p:sldId id="264" r:id="rId15"/>
     <p:sldId id="265" r:id="rId16"/>
+    <p:sldId id="266" r:id="rId17"/>
   </p:sldIdLst>
   <p:sldSz cx="18288000" cy="10287000" type="screen4x3"/>
   <p:notesSz cx="6858000" cy="9144000"/>
@@ -3099,7 +3100,7 @@
       <p:grpSpPr/>
       <p:sp>
         <p:nvSpPr>
-          <p:cNvPr id="2" name="Oval 1"/>
+          <p:cNvPr id="2" name="deckgen:decor"/>
           <p:cNvSpPr/>
           <p:nvPr/>
         </p:nvSpPr>
@@ -3129,7 +3130,7 @@
       </p:sp>
       <p:sp>
         <p:nvSpPr>
-          <p:cNvPr id="3" name="Oval 2"/>
+          <p:cNvPr id="3" name="deckgen:decor"/>
           <p:cNvSpPr/>
           <p:nvPr/>
         </p:nvSpPr>
@@ -3159,7 +3160,7 @@
       </p:sp>
       <p:sp>
         <p:nvSpPr>
-          <p:cNvPr id="4" name="Oval 3"/>
+          <p:cNvPr id="4" name="deckgen:decor"/>
           <p:cNvSpPr/>
           <p:nvPr/>
         </p:nvSpPr>
@@ -3189,7 +3190,7 @@
       </p:sp>
       <p:sp>
         <p:nvSpPr>
-          <p:cNvPr id="5" name="Rectangle 4"/>
+          <p:cNvPr id="5" name="deckgen:decor"/>
           <p:cNvSpPr/>
           <p:nvPr/>
         </p:nvSpPr>
@@ -3219,7 +3220,7 @@
       </p:sp>
       <p:sp>
         <p:nvSpPr>
-          <p:cNvPr id="6" name="Oval 5"/>
+          <p:cNvPr id="6" name="deckgen:decor"/>
           <p:cNvSpPr/>
           <p:nvPr/>
         </p:nvSpPr>
@@ -3249,7 +3250,7 @@
       </p:sp>
       <p:sp>
         <p:nvSpPr>
-          <p:cNvPr id="7" name="Oval 6"/>
+          <p:cNvPr id="7" name="deckgen:decor"/>
           <p:cNvSpPr/>
           <p:nvPr/>
         </p:nvSpPr>
@@ -3279,7 +3280,7 @@
       </p:sp>
       <p:sp>
         <p:nvSpPr>
-          <p:cNvPr id="8" name="Oval 7"/>
+          <p:cNvPr id="8" name="deckgen:decor"/>
           <p:cNvSpPr/>
           <p:nvPr/>
         </p:nvSpPr>
@@ -3309,7 +3310,7 @@
       </p:sp>
       <p:sp>
         <p:nvSpPr>
-          <p:cNvPr id="9" name="Oval 8"/>
+          <p:cNvPr id="9" name="deckgen:decor"/>
           <p:cNvSpPr/>
           <p:nvPr/>
         </p:nvSpPr>
@@ -3339,7 +3340,7 @@
       </p:sp>
       <p:sp>
         <p:nvSpPr>
-          <p:cNvPr id="10" name="Rectangle 9"/>
+          <p:cNvPr id="10" name="deckgen:decor"/>
           <p:cNvSpPr/>
           <p:nvPr/>
         </p:nvSpPr>
@@ -3599,7 +3600,1150 @@
       <p:grpSpPr/>
       <p:sp>
         <p:nvSpPr>
-          <p:cNvPr id="2" name="Oval 1"/>
+          <p:cNvPr id="2" name="deckgen:decor"/>
+          <p:cNvSpPr/>
+          <p:nvPr/>
+        </p:nvSpPr>
+        <p:spPr>
+          <a:xfrm>
+            <a:off x="15811500" y="8382000"/>
+            <a:ext cx="4953000" cy="4953000"/>
+          </a:xfrm>
+          <a:prstGeom prst="ellipse">
+            <a:avLst/>
+          </a:prstGeom>
+          <a:solidFill>
+            <a:srgbClr val="F3F6FC"/>
+          </a:solidFill>
+          <a:ln>
+            <a:noFill/>
+          </a:ln>
+          <a:effectLst/>
+        </p:spPr>
+        <p:txBody>
+          <a:bodyPr rtlCol="0" anchor="ctr" wrap="square"/>
+          <a:lstStyle/>
+          <a:p>
+            <a:pPr algn="ctr"/>
+          </a:p>
+        </p:txBody>
+      </p:sp>
+      <p:sp>
+        <p:nvSpPr>
+          <p:cNvPr id="3" name="deckgen:decor"/>
+          <p:cNvSpPr/>
+          <p:nvPr/>
+        </p:nvSpPr>
+        <p:spPr>
+          <a:xfrm>
+            <a:off x="16859250" y="9429750"/>
+            <a:ext cx="2857500" cy="2857500"/>
+          </a:xfrm>
+          <a:prstGeom prst="ellipse">
+            <a:avLst/>
+          </a:prstGeom>
+          <a:solidFill>
+            <a:srgbClr val="FFFFFF"/>
+          </a:solidFill>
+          <a:ln>
+            <a:noFill/>
+          </a:ln>
+          <a:effectLst/>
+        </p:spPr>
+        <p:txBody>
+          <a:bodyPr rtlCol="0" anchor="ctr" wrap="square"/>
+          <a:lstStyle/>
+          <a:p>
+            <a:pPr algn="ctr"/>
+          </a:p>
+        </p:txBody>
+      </p:sp>
+      <p:sp>
+        <p:nvSpPr>
+          <p:cNvPr id="4" name="deckgen:decor"/>
+          <p:cNvSpPr/>
+          <p:nvPr/>
+        </p:nvSpPr>
+        <p:spPr>
+          <a:xfrm>
+            <a:off x="-1428750" y="1428750"/>
+            <a:ext cx="2857500" cy="2857500"/>
+          </a:xfrm>
+          <a:prstGeom prst="ellipse">
+            <a:avLst/>
+          </a:prstGeom>
+          <a:solidFill>
+            <a:srgbClr val="F7F8FA"/>
+          </a:solidFill>
+          <a:ln>
+            <a:noFill/>
+          </a:ln>
+          <a:effectLst/>
+        </p:spPr>
+        <p:txBody>
+          <a:bodyPr rtlCol="0" anchor="ctr" wrap="square"/>
+          <a:lstStyle/>
+          <a:p>
+            <a:pPr algn="ctr"/>
+          </a:p>
+        </p:txBody>
+      </p:sp>
+      <p:sp>
+        <p:nvSpPr>
+          <p:cNvPr id="5" name="TextBox 4"/>
+          <p:cNvSpPr txBox="1"/>
+          <p:nvPr/>
+        </p:nvSpPr>
+        <p:spPr>
+          <a:xfrm>
+            <a:off x="1143000" y="838200"/>
+            <a:ext cx="16002000" cy="342900"/>
+          </a:xfrm>
+          <a:prstGeom prst="rect">
+            <a:avLst/>
+          </a:prstGeom>
+          <a:noFill/>
+        </p:spPr>
+        <p:txBody>
+          <a:bodyPr wrap="square" lIns="0" rIns="0" tIns="0" bIns="0" anchor="t">
+            <a:spAutoFit/>
+          </a:bodyPr>
+          <a:lstStyle/>
+          <a:p>
+            <a:pPr algn="l">
+              <a:lnSpc>
+                <a:spcPct val="100000"/>
+              </a:lnSpc>
+            </a:pPr>
+            <a:r>
+              <a:rPr sz="1950" b="1" spc="160">
+                <a:solidFill>
+                  <a:srgbClr val="1E5BC6"/>
+                </a:solidFill>
+                <a:latin typeface="Pretendard"/>
+                <a:ea typeface="Pretendard"/>
+                <a:cs typeface="Pretendard"/>
+              </a:rPr>
+              <a:t>다음 회차 예고</a:t>
+            </a:r>
+          </a:p>
+        </p:txBody>
+      </p:sp>
+      <p:sp>
+        <p:nvSpPr>
+          <p:cNvPr id="6" name="TextBox 5"/>
+          <p:cNvSpPr txBox="1"/>
+          <p:nvPr/>
+        </p:nvSpPr>
+        <p:spPr>
+          <a:xfrm>
+            <a:off x="1143000" y="1162050"/>
+            <a:ext cx="16002000" cy="762000"/>
+          </a:xfrm>
+          <a:prstGeom prst="rect">
+            <a:avLst/>
+          </a:prstGeom>
+          <a:noFill/>
+        </p:spPr>
+        <p:txBody>
+          <a:bodyPr wrap="square" lIns="0" rIns="0" tIns="0" bIns="0" anchor="t">
+            <a:spAutoFit/>
+          </a:bodyPr>
+          <a:lstStyle/>
+          <a:p>
+            <a:pPr algn="l">
+              <a:lnSpc>
+                <a:spcPct val="100000"/>
+              </a:lnSpc>
+            </a:pPr>
+            <a:r>
+              <a:rPr sz="5100" b="1">
+                <a:solidFill>
+                  <a:srgbClr val="0D2B5E"/>
+                </a:solidFill>
+                <a:latin typeface="Pretendard"/>
+                <a:ea typeface="Pretendard"/>
+                <a:cs typeface="Pretendard"/>
+              </a:rPr>
+              <a:t>3-5 · Pandas와 DuckDB를 이용한 하이브리드 가공</a:t>
+            </a:r>
+          </a:p>
+        </p:txBody>
+      </p:sp>
+      <p:sp>
+        <p:nvSpPr>
+          <p:cNvPr id="7" name="Rectangle 6"/>
+          <p:cNvSpPr/>
+          <p:nvPr/>
+        </p:nvSpPr>
+        <p:spPr>
+          <a:xfrm>
+            <a:off x="1143000" y="2038350"/>
+            <a:ext cx="16002000" cy="28575"/>
+          </a:xfrm>
+          <a:prstGeom prst="rect">
+            <a:avLst/>
+          </a:prstGeom>
+          <a:solidFill>
+            <a:srgbClr val="0D2B5E"/>
+          </a:solidFill>
+          <a:ln>
+            <a:noFill/>
+          </a:ln>
+          <a:effectLst/>
+        </p:spPr>
+        <p:txBody>
+          <a:bodyPr rtlCol="0" anchor="ctr" wrap="square"/>
+          <a:lstStyle/>
+          <a:p>
+            <a:pPr algn="ctr"/>
+          </a:p>
+        </p:txBody>
+      </p:sp>
+      <p:sp>
+        <p:nvSpPr>
+          <p:cNvPr id="8" name="Rounded Rectangle 7"/>
+          <p:cNvSpPr/>
+          <p:nvPr/>
+        </p:nvSpPr>
+        <p:spPr>
+          <a:xfrm>
+            <a:off x="1143000" y="3429000"/>
+            <a:ext cx="3714750" cy="2476500"/>
+          </a:xfrm>
+          <a:prstGeom prst="roundRect">
+            <a:avLst>
+              <a:gd name="adj" fmla="val 1923"/>
+            </a:avLst>
+          </a:prstGeom>
+          <a:solidFill>
+            <a:srgbClr val="FAFBFD"/>
+          </a:solidFill>
+          <a:ln w="9525">
+            <a:solidFill>
+              <a:srgbClr val="DCE1E8"/>
+            </a:solidFill>
+          </a:ln>
+          <a:effectLst/>
+        </p:spPr>
+        <p:txBody>
+          <a:bodyPr rtlCol="0" anchor="ctr" wrap="square"/>
+          <a:lstStyle/>
+          <a:p>
+            <a:pPr algn="ctr"/>
+          </a:p>
+        </p:txBody>
+      </p:sp>
+      <p:sp>
+        <p:nvSpPr>
+          <p:cNvPr id="9" name="Rectangle 8"/>
+          <p:cNvSpPr/>
+          <p:nvPr/>
+        </p:nvSpPr>
+        <p:spPr>
+          <a:xfrm>
+            <a:off x="1143000" y="3429000"/>
+            <a:ext cx="3714750" cy="47625"/>
+          </a:xfrm>
+          <a:prstGeom prst="rect">
+            <a:avLst/>
+          </a:prstGeom>
+          <a:solidFill>
+            <a:srgbClr val="1E5BC6"/>
+          </a:solidFill>
+          <a:ln>
+            <a:noFill/>
+          </a:ln>
+          <a:effectLst/>
+        </p:spPr>
+        <p:txBody>
+          <a:bodyPr rtlCol="0" anchor="ctr" wrap="square"/>
+          <a:lstStyle/>
+          <a:p>
+            <a:pPr algn="ctr"/>
+          </a:p>
+        </p:txBody>
+      </p:sp>
+      <p:sp>
+        <p:nvSpPr>
+          <p:cNvPr id="10" name="deckgen:ornament"/>
+          <p:cNvSpPr txBox="1"/>
+          <p:nvPr/>
+        </p:nvSpPr>
+        <p:spPr>
+          <a:xfrm>
+            <a:off x="4000500" y="3638550"/>
+            <a:ext cx="590550" cy="400050"/>
+          </a:xfrm>
+          <a:prstGeom prst="rect">
+            <a:avLst/>
+          </a:prstGeom>
+          <a:noFill/>
+        </p:spPr>
+        <p:txBody>
+          <a:bodyPr wrap="square" lIns="0" rIns="0" tIns="0" bIns="0" anchor="t">
+            <a:spAutoFit/>
+          </a:bodyPr>
+          <a:lstStyle/>
+          <a:p>
+            <a:pPr algn="r">
+              <a:lnSpc>
+                <a:spcPct val="100000"/>
+              </a:lnSpc>
+            </a:pPr>
+            <a:r>
+              <a:rPr sz="2550" b="1">
+                <a:solidFill>
+                  <a:srgbClr val="E4EBF4"/>
+                </a:solidFill>
+                <a:latin typeface="Pretendard"/>
+                <a:ea typeface="Pretendard"/>
+                <a:cs typeface="Pretendard"/>
+              </a:rPr>
+              <a:t>01</a:t>
+            </a:r>
+          </a:p>
+        </p:txBody>
+      </p:sp>
+      <p:sp>
+        <p:nvSpPr>
+          <p:cNvPr id="11" name="TextBox 10"/>
+          <p:cNvSpPr txBox="1"/>
+          <p:nvPr/>
+        </p:nvSpPr>
+        <p:spPr>
+          <a:xfrm>
+            <a:off x="1466850" y="3752850"/>
+            <a:ext cx="3067050" cy="1828800"/>
+          </a:xfrm>
+          <a:prstGeom prst="rect">
+            <a:avLst/>
+          </a:prstGeom>
+          <a:noFill/>
+        </p:spPr>
+        <p:txBody>
+          <a:bodyPr wrap="square" lIns="0" rIns="0" tIns="0" bIns="0" anchor="ctr">
+            <a:spAutoFit/>
+          </a:bodyPr>
+          <a:lstStyle/>
+          <a:p>
+            <a:pPr>
+              <a:lnSpc>
+                <a:spcPct val="115000"/>
+              </a:lnSpc>
+            </a:pPr>
+            <a:r>
+              <a:rPr sz="2700" b="1">
+                <a:solidFill>
+                  <a:srgbClr val="0D2B5E"/>
+                </a:solidFill>
+                <a:latin typeface="Pretendard"/>
+                <a:ea typeface="Pretendard"/>
+                <a:cs typeface="Pretendard"/>
+              </a:rPr>
+              <a:t>이론 1H</a:t>
+            </a:r>
+          </a:p>
+          <a:p>
+            <a:pPr>
+              <a:lnSpc>
+                <a:spcPct val="146000"/>
+              </a:lnSpc>
+              <a:spcBef>
+                <a:spcPts val="1050"/>
+              </a:spcBef>
+            </a:pPr>
+            <a:r>
+              <a:rPr sz="2025" b="0">
+                <a:solidFill>
+                  <a:srgbClr val="3D3D3D"/>
+                </a:solidFill>
+                <a:latin typeface="Pretendard"/>
+                <a:ea typeface="Pretendard"/>
+                <a:cs typeface="Pretendard"/>
+              </a:rPr>
+              <a:t>하이브리드 설계</a:t>
+            </a:r>
+          </a:p>
+          <a:p>
+            <a:pPr>
+              <a:lnSpc>
+                <a:spcPct val="146000"/>
+              </a:lnSpc>
+            </a:pPr>
+            <a:r>
+              <a:rPr sz="2025" b="0">
+                <a:solidFill>
+                  <a:srgbClr val="3D3D3D"/>
+                </a:solidFill>
+                <a:latin typeface="Pretendard"/>
+                <a:ea typeface="Pretendard"/>
+                <a:cs typeface="Pretendard"/>
+              </a:rPr>
+              <a:t>역할 분담·품질 항목</a:t>
+            </a:r>
+          </a:p>
+        </p:txBody>
+      </p:sp>
+      <p:sp>
+        <p:nvSpPr>
+          <p:cNvPr id="12" name="Rounded Rectangle 11"/>
+          <p:cNvSpPr/>
+          <p:nvPr/>
+        </p:nvSpPr>
+        <p:spPr>
+          <a:xfrm>
+            <a:off x="5238750" y="3429000"/>
+            <a:ext cx="3714750" cy="2476500"/>
+          </a:xfrm>
+          <a:prstGeom prst="roundRect">
+            <a:avLst>
+              <a:gd name="adj" fmla="val 1923"/>
+            </a:avLst>
+          </a:prstGeom>
+          <a:solidFill>
+            <a:srgbClr val="FAFBFD"/>
+          </a:solidFill>
+          <a:ln w="9525">
+            <a:solidFill>
+              <a:srgbClr val="DCE1E8"/>
+            </a:solidFill>
+          </a:ln>
+          <a:effectLst/>
+        </p:spPr>
+        <p:txBody>
+          <a:bodyPr rtlCol="0" anchor="ctr" wrap="square"/>
+          <a:lstStyle/>
+          <a:p>
+            <a:pPr algn="ctr"/>
+          </a:p>
+        </p:txBody>
+      </p:sp>
+      <p:sp>
+        <p:nvSpPr>
+          <p:cNvPr id="13" name="Rectangle 12"/>
+          <p:cNvSpPr/>
+          <p:nvPr/>
+        </p:nvSpPr>
+        <p:spPr>
+          <a:xfrm>
+            <a:off x="5238750" y="3429000"/>
+            <a:ext cx="3714750" cy="47625"/>
+          </a:xfrm>
+          <a:prstGeom prst="rect">
+            <a:avLst/>
+          </a:prstGeom>
+          <a:solidFill>
+            <a:srgbClr val="1E5BC6"/>
+          </a:solidFill>
+          <a:ln>
+            <a:noFill/>
+          </a:ln>
+          <a:effectLst/>
+        </p:spPr>
+        <p:txBody>
+          <a:bodyPr rtlCol="0" anchor="ctr" wrap="square"/>
+          <a:lstStyle/>
+          <a:p>
+            <a:pPr algn="ctr"/>
+          </a:p>
+        </p:txBody>
+      </p:sp>
+      <p:sp>
+        <p:nvSpPr>
+          <p:cNvPr id="14" name="deckgen:ornament"/>
+          <p:cNvSpPr txBox="1"/>
+          <p:nvPr/>
+        </p:nvSpPr>
+        <p:spPr>
+          <a:xfrm>
+            <a:off x="8096250" y="3638550"/>
+            <a:ext cx="590550" cy="400050"/>
+          </a:xfrm>
+          <a:prstGeom prst="rect">
+            <a:avLst/>
+          </a:prstGeom>
+          <a:noFill/>
+        </p:spPr>
+        <p:txBody>
+          <a:bodyPr wrap="square" lIns="0" rIns="0" tIns="0" bIns="0" anchor="t">
+            <a:spAutoFit/>
+          </a:bodyPr>
+          <a:lstStyle/>
+          <a:p>
+            <a:pPr algn="r">
+              <a:lnSpc>
+                <a:spcPct val="100000"/>
+              </a:lnSpc>
+            </a:pPr>
+            <a:r>
+              <a:rPr sz="2550" b="1">
+                <a:solidFill>
+                  <a:srgbClr val="E4EBF4"/>
+                </a:solidFill>
+                <a:latin typeface="Pretendard"/>
+                <a:ea typeface="Pretendard"/>
+                <a:cs typeface="Pretendard"/>
+              </a:rPr>
+              <a:t>02</a:t>
+            </a:r>
+          </a:p>
+        </p:txBody>
+      </p:sp>
+      <p:sp>
+        <p:nvSpPr>
+          <p:cNvPr id="15" name="TextBox 14"/>
+          <p:cNvSpPr txBox="1"/>
+          <p:nvPr/>
+        </p:nvSpPr>
+        <p:spPr>
+          <a:xfrm>
+            <a:off x="5562600" y="3752850"/>
+            <a:ext cx="3067050" cy="1828800"/>
+          </a:xfrm>
+          <a:prstGeom prst="rect">
+            <a:avLst/>
+          </a:prstGeom>
+          <a:noFill/>
+        </p:spPr>
+        <p:txBody>
+          <a:bodyPr wrap="square" lIns="0" rIns="0" tIns="0" bIns="0" anchor="ctr">
+            <a:spAutoFit/>
+          </a:bodyPr>
+          <a:lstStyle/>
+          <a:p>
+            <a:pPr>
+              <a:lnSpc>
+                <a:spcPct val="115000"/>
+              </a:lnSpc>
+            </a:pPr>
+            <a:r>
+              <a:rPr sz="2700" b="1">
+                <a:solidFill>
+                  <a:srgbClr val="0D2B5E"/>
+                </a:solidFill>
+                <a:latin typeface="Pretendard"/>
+                <a:ea typeface="Pretendard"/>
+                <a:cs typeface="Pretendard"/>
+              </a:rPr>
+              <a:t>실습 1.5H</a:t>
+            </a:r>
+          </a:p>
+          <a:p>
+            <a:pPr>
+              <a:lnSpc>
+                <a:spcPct val="146000"/>
+              </a:lnSpc>
+              <a:spcBef>
+                <a:spcPts val="1050"/>
+              </a:spcBef>
+            </a:pPr>
+            <a:r>
+              <a:rPr sz="2025" b="0">
+                <a:solidFill>
+                  <a:srgbClr val="3D3D3D"/>
+                </a:solidFill>
+                <a:latin typeface="Pretendard"/>
+                <a:ea typeface="Pretendard"/>
+                <a:cs typeface="Pretendard"/>
+              </a:rPr>
+              <a:t>정제 파이프라인</a:t>
+            </a:r>
+          </a:p>
+          <a:p>
+            <a:pPr>
+              <a:lnSpc>
+                <a:spcPct val="146000"/>
+              </a:lnSpc>
+            </a:pPr>
+            <a:r>
+              <a:rPr sz="2025" b="0">
+                <a:solidFill>
+                  <a:srgbClr val="3D3D3D"/>
+                </a:solidFill>
+                <a:latin typeface="Pretendard"/>
+                <a:ea typeface="Pretendard"/>
+                <a:cs typeface="Pretendard"/>
+              </a:rPr>
+              <a:t>함수 단위 구현</a:t>
+            </a:r>
+          </a:p>
+        </p:txBody>
+      </p:sp>
+      <p:sp>
+        <p:nvSpPr>
+          <p:cNvPr id="16" name="Rounded Rectangle 15"/>
+          <p:cNvSpPr/>
+          <p:nvPr/>
+        </p:nvSpPr>
+        <p:spPr>
+          <a:xfrm>
+            <a:off x="9334500" y="3429000"/>
+            <a:ext cx="3714750" cy="2476500"/>
+          </a:xfrm>
+          <a:prstGeom prst="roundRect">
+            <a:avLst>
+              <a:gd name="adj" fmla="val 1923"/>
+            </a:avLst>
+          </a:prstGeom>
+          <a:solidFill>
+            <a:srgbClr val="0D2B5E"/>
+          </a:solidFill>
+          <a:ln w="9525">
+            <a:solidFill>
+              <a:srgbClr val="0D2B5E"/>
+            </a:solidFill>
+          </a:ln>
+          <a:effectLst/>
+        </p:spPr>
+        <p:txBody>
+          <a:bodyPr rtlCol="0" anchor="ctr" wrap="square"/>
+          <a:lstStyle/>
+          <a:p>
+            <a:pPr algn="ctr"/>
+          </a:p>
+        </p:txBody>
+      </p:sp>
+      <p:sp>
+        <p:nvSpPr>
+          <p:cNvPr id="17" name="Rectangle 16"/>
+          <p:cNvSpPr/>
+          <p:nvPr/>
+        </p:nvSpPr>
+        <p:spPr>
+          <a:xfrm>
+            <a:off x="9334500" y="3429000"/>
+            <a:ext cx="3714750" cy="47625"/>
+          </a:xfrm>
+          <a:prstGeom prst="rect">
+            <a:avLst/>
+          </a:prstGeom>
+          <a:solidFill>
+            <a:srgbClr val="1E5BC6"/>
+          </a:solidFill>
+          <a:ln>
+            <a:noFill/>
+          </a:ln>
+          <a:effectLst/>
+        </p:spPr>
+        <p:txBody>
+          <a:bodyPr rtlCol="0" anchor="ctr" wrap="square"/>
+          <a:lstStyle/>
+          <a:p>
+            <a:pPr algn="ctr"/>
+          </a:p>
+        </p:txBody>
+      </p:sp>
+      <p:sp>
+        <p:nvSpPr>
+          <p:cNvPr id="18" name="deckgen:ornament"/>
+          <p:cNvSpPr txBox="1"/>
+          <p:nvPr/>
+        </p:nvSpPr>
+        <p:spPr>
+          <a:xfrm>
+            <a:off x="12192000" y="3638550"/>
+            <a:ext cx="590550" cy="400050"/>
+          </a:xfrm>
+          <a:prstGeom prst="rect">
+            <a:avLst/>
+          </a:prstGeom>
+          <a:noFill/>
+        </p:spPr>
+        <p:txBody>
+          <a:bodyPr wrap="square" lIns="0" rIns="0" tIns="0" bIns="0" anchor="t">
+            <a:spAutoFit/>
+          </a:bodyPr>
+          <a:lstStyle/>
+          <a:p>
+            <a:pPr algn="r">
+              <a:lnSpc>
+                <a:spcPct val="100000"/>
+              </a:lnSpc>
+            </a:pPr>
+            <a:r>
+              <a:rPr sz="2550" b="1">
+                <a:solidFill>
+                  <a:srgbClr val="3B4B7C"/>
+                </a:solidFill>
+                <a:latin typeface="Pretendard"/>
+                <a:ea typeface="Pretendard"/>
+                <a:cs typeface="Pretendard"/>
+              </a:rPr>
+              <a:t>03</a:t>
+            </a:r>
+          </a:p>
+        </p:txBody>
+      </p:sp>
+      <p:sp>
+        <p:nvSpPr>
+          <p:cNvPr id="19" name="TextBox 18"/>
+          <p:cNvSpPr txBox="1"/>
+          <p:nvPr/>
+        </p:nvSpPr>
+        <p:spPr>
+          <a:xfrm>
+            <a:off x="9658350" y="3752850"/>
+            <a:ext cx="3067050" cy="1828800"/>
+          </a:xfrm>
+          <a:prstGeom prst="rect">
+            <a:avLst/>
+          </a:prstGeom>
+          <a:noFill/>
+        </p:spPr>
+        <p:txBody>
+          <a:bodyPr wrap="square" lIns="0" rIns="0" tIns="0" bIns="0" anchor="ctr">
+            <a:spAutoFit/>
+          </a:bodyPr>
+          <a:lstStyle/>
+          <a:p>
+            <a:pPr>
+              <a:lnSpc>
+                <a:spcPct val="115000"/>
+              </a:lnSpc>
+            </a:pPr>
+            <a:r>
+              <a:rPr sz="2700" b="1">
+                <a:solidFill>
+                  <a:srgbClr val="FFFFFF"/>
+                </a:solidFill>
+                <a:latin typeface="Pretendard"/>
+                <a:ea typeface="Pretendard"/>
+                <a:cs typeface="Pretendard"/>
+              </a:rPr>
+              <a:t>실습 1H</a:t>
+            </a:r>
+          </a:p>
+          <a:p>
+            <a:pPr>
+              <a:lnSpc>
+                <a:spcPct val="146000"/>
+              </a:lnSpc>
+              <a:spcBef>
+                <a:spcPts val="1050"/>
+              </a:spcBef>
+            </a:pPr>
+            <a:r>
+              <a:rPr sz="2025" b="0">
+                <a:solidFill>
+                  <a:srgbClr val="D9E2F0"/>
+                </a:solidFill>
+                <a:latin typeface="Pretendard"/>
+                <a:ea typeface="Pretendard"/>
+                <a:cs typeface="Pretendard"/>
+              </a:rPr>
+              <a:t>품질 리포트 작성</a:t>
+            </a:r>
+          </a:p>
+          <a:p>
+            <a:pPr>
+              <a:lnSpc>
+                <a:spcPct val="146000"/>
+              </a:lnSpc>
+            </a:pPr>
+            <a:r>
+              <a:rPr sz="2025" b="0">
+                <a:solidFill>
+                  <a:srgbClr val="D9E2F0"/>
+                </a:solidFill>
+                <a:latin typeface="Pretendard"/>
+                <a:ea typeface="Pretendard"/>
+                <a:cs typeface="Pretendard"/>
+              </a:rPr>
+              <a:t>주차 산출물 제출</a:t>
+            </a:r>
+          </a:p>
+        </p:txBody>
+      </p:sp>
+      <p:sp>
+        <p:nvSpPr>
+          <p:cNvPr id="20" name="Rounded Rectangle 19"/>
+          <p:cNvSpPr/>
+          <p:nvPr/>
+        </p:nvSpPr>
+        <p:spPr>
+          <a:xfrm>
+            <a:off x="13430250" y="3429000"/>
+            <a:ext cx="3714750" cy="2476500"/>
+          </a:xfrm>
+          <a:prstGeom prst="roundRect">
+            <a:avLst>
+              <a:gd name="adj" fmla="val 1923"/>
+            </a:avLst>
+          </a:prstGeom>
+          <a:solidFill>
+            <a:srgbClr val="FAFBFD"/>
+          </a:solidFill>
+          <a:ln w="9525">
+            <a:solidFill>
+              <a:srgbClr val="DCE1E8"/>
+            </a:solidFill>
+          </a:ln>
+          <a:effectLst/>
+        </p:spPr>
+        <p:txBody>
+          <a:bodyPr rtlCol="0" anchor="ctr" wrap="square"/>
+          <a:lstStyle/>
+          <a:p>
+            <a:pPr algn="ctr"/>
+          </a:p>
+        </p:txBody>
+      </p:sp>
+      <p:sp>
+        <p:nvSpPr>
+          <p:cNvPr id="21" name="Rectangle 20"/>
+          <p:cNvSpPr/>
+          <p:nvPr/>
+        </p:nvSpPr>
+        <p:spPr>
+          <a:xfrm>
+            <a:off x="13430250" y="3429000"/>
+            <a:ext cx="3714750" cy="47625"/>
+          </a:xfrm>
+          <a:prstGeom prst="rect">
+            <a:avLst/>
+          </a:prstGeom>
+          <a:solidFill>
+            <a:srgbClr val="1E5BC6"/>
+          </a:solidFill>
+          <a:ln>
+            <a:noFill/>
+          </a:ln>
+          <a:effectLst/>
+        </p:spPr>
+        <p:txBody>
+          <a:bodyPr rtlCol="0" anchor="ctr" wrap="square"/>
+          <a:lstStyle/>
+          <a:p>
+            <a:pPr algn="ctr"/>
+          </a:p>
+        </p:txBody>
+      </p:sp>
+      <p:sp>
+        <p:nvSpPr>
+          <p:cNvPr id="22" name="deckgen:ornament"/>
+          <p:cNvSpPr txBox="1"/>
+          <p:nvPr/>
+        </p:nvSpPr>
+        <p:spPr>
+          <a:xfrm>
+            <a:off x="16287750" y="3638550"/>
+            <a:ext cx="590550" cy="400050"/>
+          </a:xfrm>
+          <a:prstGeom prst="rect">
+            <a:avLst/>
+          </a:prstGeom>
+          <a:noFill/>
+        </p:spPr>
+        <p:txBody>
+          <a:bodyPr wrap="square" lIns="0" rIns="0" tIns="0" bIns="0" anchor="t">
+            <a:spAutoFit/>
+          </a:bodyPr>
+          <a:lstStyle/>
+          <a:p>
+            <a:pPr algn="r">
+              <a:lnSpc>
+                <a:spcPct val="100000"/>
+              </a:lnSpc>
+            </a:pPr>
+            <a:r>
+              <a:rPr sz="2550" b="1">
+                <a:solidFill>
+                  <a:srgbClr val="E4EBF4"/>
+                </a:solidFill>
+                <a:latin typeface="Pretendard"/>
+                <a:ea typeface="Pretendard"/>
+                <a:cs typeface="Pretendard"/>
+              </a:rPr>
+              <a:t>04</a:t>
+            </a:r>
+          </a:p>
+        </p:txBody>
+      </p:sp>
+      <p:sp>
+        <p:nvSpPr>
+          <p:cNvPr id="23" name="TextBox 22"/>
+          <p:cNvSpPr txBox="1"/>
+          <p:nvPr/>
+        </p:nvSpPr>
+        <p:spPr>
+          <a:xfrm>
+            <a:off x="13754100" y="3752850"/>
+            <a:ext cx="3067050" cy="1828800"/>
+          </a:xfrm>
+          <a:prstGeom prst="rect">
+            <a:avLst/>
+          </a:prstGeom>
+          <a:noFill/>
+        </p:spPr>
+        <p:txBody>
+          <a:bodyPr wrap="square" lIns="0" rIns="0" tIns="0" bIns="0" anchor="ctr">
+            <a:spAutoFit/>
+          </a:bodyPr>
+          <a:lstStyle/>
+          <a:p>
+            <a:pPr>
+              <a:lnSpc>
+                <a:spcPct val="115000"/>
+              </a:lnSpc>
+            </a:pPr>
+            <a:r>
+              <a:rPr sz="2700" b="1">
+                <a:solidFill>
+                  <a:srgbClr val="0D2B5E"/>
+                </a:solidFill>
+                <a:latin typeface="Pretendard"/>
+                <a:ea typeface="Pretendard"/>
+                <a:cs typeface="Pretendard"/>
+              </a:rPr>
+              <a:t>정리 0.5H</a:t>
+            </a:r>
+          </a:p>
+          <a:p>
+            <a:pPr>
+              <a:lnSpc>
+                <a:spcPct val="146000"/>
+              </a:lnSpc>
+              <a:spcBef>
+                <a:spcPts val="1050"/>
+              </a:spcBef>
+            </a:pPr>
+            <a:r>
+              <a:rPr sz="2025" b="0">
+                <a:solidFill>
+                  <a:srgbClr val="3D3D3D"/>
+                </a:solidFill>
+                <a:latin typeface="Pretendard"/>
+                <a:ea typeface="Pretendard"/>
+                <a:cs typeface="Pretendard"/>
+              </a:rPr>
+              <a:t>주차 회고</a:t>
+            </a:r>
+          </a:p>
+          <a:p>
+            <a:pPr>
+              <a:lnSpc>
+                <a:spcPct val="146000"/>
+              </a:lnSpc>
+            </a:pPr>
+            <a:r>
+              <a:rPr sz="2025" b="0">
+                <a:solidFill>
+                  <a:srgbClr val="3D3D3D"/>
+                </a:solidFill>
+                <a:latin typeface="Pretendard"/>
+                <a:ea typeface="Pretendard"/>
+                <a:cs typeface="Pretendard"/>
+              </a:rPr>
+              <a:t>산출물 점검</a:t>
+            </a:r>
+          </a:p>
+        </p:txBody>
+      </p:sp>
+      <p:sp>
+        <p:nvSpPr>
+          <p:cNvPr id="24" name="Rectangle 23"/>
+          <p:cNvSpPr/>
+          <p:nvPr/>
+        </p:nvSpPr>
+        <p:spPr>
+          <a:xfrm>
+            <a:off x="1143000" y="6496050"/>
+            <a:ext cx="47625" cy="723900"/>
+          </a:xfrm>
+          <a:prstGeom prst="rect">
+            <a:avLst/>
+          </a:prstGeom>
+          <a:solidFill>
+            <a:srgbClr val="1E5BC6"/>
+          </a:solidFill>
+          <a:ln>
+            <a:noFill/>
+          </a:ln>
+          <a:effectLst/>
+        </p:spPr>
+        <p:txBody>
+          <a:bodyPr rtlCol="0" anchor="ctr" wrap="square"/>
+          <a:lstStyle/>
+          <a:p>
+            <a:pPr algn="ctr"/>
+          </a:p>
+        </p:txBody>
+      </p:sp>
+      <p:sp>
+        <p:nvSpPr>
+          <p:cNvPr id="25" name="TextBox 24"/>
+          <p:cNvSpPr txBox="1"/>
+          <p:nvPr/>
+        </p:nvSpPr>
+        <p:spPr>
+          <a:xfrm>
+            <a:off x="1390650" y="6553200"/>
+            <a:ext cx="15754350" cy="762000"/>
+          </a:xfrm>
+          <a:prstGeom prst="rect">
+            <a:avLst/>
+          </a:prstGeom>
+          <a:noFill/>
+        </p:spPr>
+        <p:txBody>
+          <a:bodyPr wrap="square" lIns="0" rIns="0" tIns="0" bIns="0" anchor="t">
+            <a:spAutoFit/>
+          </a:bodyPr>
+          <a:lstStyle/>
+          <a:p>
+            <a:pPr algn="l">
+              <a:lnSpc>
+                <a:spcPct val="150000"/>
+              </a:lnSpc>
+            </a:pPr>
+            <a:r>
+              <a:rPr sz="2025" b="1">
+                <a:solidFill>
+                  <a:srgbClr val="7D7D7D"/>
+                </a:solidFill>
+                <a:latin typeface="Pretendard"/>
+                <a:ea typeface="Pretendard"/>
+                <a:cs typeface="Pretendard"/>
+              </a:rPr>
+              <a:t>준비: 3-1 의 orders.csv(36244 bytes · 1016 줄) — 없으면 make_orders.py 재실행(시드 고정)</a:t>
+            </a:r>
+          </a:p>
+        </p:txBody>
+      </p:sp>
+      <p:sp>
+        <p:nvSpPr>
+          <p:cNvPr id="26" name="Rectangle 25"/>
+          <p:cNvSpPr/>
+          <p:nvPr/>
+        </p:nvSpPr>
+        <p:spPr>
+          <a:xfrm>
+            <a:off x="1143000" y="8058150"/>
+            <a:ext cx="16002000" cy="9525"/>
+          </a:xfrm>
+          <a:prstGeom prst="rect">
+            <a:avLst/>
+          </a:prstGeom>
+          <a:solidFill>
+            <a:srgbClr val="DCE1E8"/>
+          </a:solidFill>
+          <a:ln>
+            <a:noFill/>
+          </a:ln>
+          <a:effectLst/>
+        </p:spPr>
+        <p:txBody>
+          <a:bodyPr rtlCol="0" anchor="ctr" wrap="square"/>
+          <a:lstStyle/>
+          <a:p>
+            <a:pPr algn="ctr"/>
+          </a:p>
+        </p:txBody>
+      </p:sp>
+      <p:sp>
+        <p:nvSpPr>
+          <p:cNvPr id="27" name="TextBox 26"/>
+          <p:cNvSpPr txBox="1"/>
+          <p:nvPr/>
+        </p:nvSpPr>
+        <p:spPr>
+          <a:xfrm>
+            <a:off x="1143000" y="8248650"/>
+            <a:ext cx="13335000" cy="323850"/>
+          </a:xfrm>
+          <a:prstGeom prst="rect">
+            <a:avLst/>
+          </a:prstGeom>
+          <a:noFill/>
+        </p:spPr>
+        <p:txBody>
+          <a:bodyPr wrap="square" lIns="0" rIns="0" tIns="0" bIns="0" anchor="t">
+            <a:spAutoFit/>
+          </a:bodyPr>
+          <a:lstStyle/>
+          <a:p>
+            <a:pPr algn="l">
+              <a:lnSpc>
+                <a:spcPct val="100000"/>
+              </a:lnSpc>
+            </a:pPr>
+            <a:r>
+              <a:rPr sz="1725" b="0">
+                <a:solidFill>
+                  <a:srgbClr val="7D7D7D"/>
+                </a:solidFill>
+                <a:latin typeface="Pretendard"/>
+                <a:ea typeface="Pretendard"/>
+                <a:cs typeface="Pretendard"/>
+              </a:rPr>
+              <a:t>데이터 엔지니어링 &amp; RAG 파이프라인 160H · 3-4 · 정리·회고 0.5H</a:t>
+            </a:r>
+          </a:p>
+        </p:txBody>
+      </p:sp>
+      <p:sp>
+        <p:nvSpPr>
+          <p:cNvPr id="28" name="TextBox 27"/>
+          <p:cNvSpPr txBox="1"/>
+          <p:nvPr/>
+        </p:nvSpPr>
+        <p:spPr>
+          <a:xfrm>
+            <a:off x="15240000" y="8248650"/>
+            <a:ext cx="1905000" cy="323850"/>
+          </a:xfrm>
+          <a:prstGeom prst="rect">
+            <a:avLst/>
+          </a:prstGeom>
+          <a:noFill/>
+        </p:spPr>
+        <p:txBody>
+          <a:bodyPr wrap="square" lIns="0" rIns="0" tIns="0" bIns="0" anchor="t">
+            <a:spAutoFit/>
+          </a:bodyPr>
+          <a:lstStyle/>
+          <a:p>
+            <a:pPr algn="r">
+              <a:lnSpc>
+                <a:spcPct val="100000"/>
+              </a:lnSpc>
+            </a:pPr>
+            <a:r>
+              <a:rPr sz="1725" b="0">
+                <a:solidFill>
+                  <a:srgbClr val="7D7D7D"/>
+                </a:solidFill>
+                <a:latin typeface="Pretendard"/>
+                <a:ea typeface="Pretendard"/>
+                <a:cs typeface="Pretendard"/>
+              </a:rPr>
+              <a:t>10</a:t>
+            </a:r>
+          </a:p>
+        </p:txBody>
+      </p:sp>
+    </p:spTree>
+  </p:cSld>
+  <p:clrMapOvr>
+    <a:masterClrMapping/>
+  </p:clrMapOvr>
+</p:sld>
+</file>
+
+<file path=ppt/slides/slide11.xml><?xml version="1.0" encoding="utf-8"?>
+<p:sld xmlns:a="http://schemas.openxmlformats.org/drawingml/2006/main" xmlns:p="http://schemas.openxmlformats.org/presentationml/2006/main" xmlns:r="http://schemas.openxmlformats.org/officeDocument/2006/relationships">
+  <p:cSld>
+    <p:spTree>
+      <p:nvGrpSpPr>
+        <p:cNvPr id="1" name=""/>
+        <p:cNvGrpSpPr/>
+        <p:nvPr/>
+      </p:nvGrpSpPr>
+      <p:grpSpPr/>
+      <p:sp>
+        <p:nvSpPr>
+          <p:cNvPr id="2" name="deckgen:decor"/>
           <p:cNvSpPr/>
           <p:nvPr/>
         </p:nvSpPr>
@@ -3629,7 +4773,7 @@
       </p:sp>
       <p:sp>
         <p:nvSpPr>
-          <p:cNvPr id="3" name="Oval 2"/>
+          <p:cNvPr id="3" name="deckgen:decor"/>
           <p:cNvSpPr/>
           <p:nvPr/>
         </p:nvSpPr>
@@ -4406,7 +5550,7 @@
       <p:grpSpPr/>
       <p:sp>
         <p:nvSpPr>
-          <p:cNvPr id="2" name="Oval 1"/>
+          <p:cNvPr id="2" name="deckgen:decor"/>
           <p:cNvSpPr/>
           <p:nvPr/>
         </p:nvSpPr>
@@ -4436,7 +5580,7 @@
       </p:sp>
       <p:sp>
         <p:nvSpPr>
-          <p:cNvPr id="3" name="Oval 2"/>
+          <p:cNvPr id="3" name="deckgen:decor"/>
           <p:cNvSpPr/>
           <p:nvPr/>
         </p:nvSpPr>
@@ -4466,7 +5610,7 @@
       </p:sp>
       <p:sp>
         <p:nvSpPr>
-          <p:cNvPr id="4" name="Oval 3"/>
+          <p:cNvPr id="4" name="deckgen:decor"/>
           <p:cNvSpPr/>
           <p:nvPr/>
         </p:nvSpPr>
@@ -5397,7 +6541,7 @@
       <p:grpSpPr/>
       <p:sp>
         <p:nvSpPr>
-          <p:cNvPr id="2" name="Oval 1"/>
+          <p:cNvPr id="2" name="deckgen:decor"/>
           <p:cNvSpPr/>
           <p:nvPr/>
         </p:nvSpPr>
@@ -5427,7 +6571,7 @@
       </p:sp>
       <p:sp>
         <p:nvSpPr>
-          <p:cNvPr id="3" name="Oval 2"/>
+          <p:cNvPr id="3" name="deckgen:decor"/>
           <p:cNvSpPr/>
           <p:nvPr/>
         </p:nvSpPr>
@@ -5457,7 +6601,7 @@
       </p:sp>
       <p:sp>
         <p:nvSpPr>
-          <p:cNvPr id="4" name="Oval 3"/>
+          <p:cNvPr id="4" name="deckgen:decor"/>
           <p:cNvSpPr/>
           <p:nvPr/>
         </p:nvSpPr>
@@ -6812,7 +7956,7 @@
       <p:grpSpPr/>
       <p:sp>
         <p:nvSpPr>
-          <p:cNvPr id="2" name="Oval 1"/>
+          <p:cNvPr id="2" name="deckgen:decor"/>
           <p:cNvSpPr/>
           <p:nvPr/>
         </p:nvSpPr>
@@ -6842,7 +7986,7 @@
       </p:sp>
       <p:sp>
         <p:nvSpPr>
-          <p:cNvPr id="3" name="Oval 2"/>
+          <p:cNvPr id="3" name="deckgen:decor"/>
           <p:cNvSpPr/>
           <p:nvPr/>
         </p:nvSpPr>
@@ -6872,7 +8016,7 @@
       </p:sp>
       <p:sp>
         <p:nvSpPr>
-          <p:cNvPr id="4" name="Oval 3"/>
+          <p:cNvPr id="4" name="deckgen:decor"/>
           <p:cNvSpPr/>
           <p:nvPr/>
         </p:nvSpPr>
@@ -8077,7 +9221,7 @@
       <p:grpSpPr/>
       <p:sp>
         <p:nvSpPr>
-          <p:cNvPr id="2" name="Oval 1"/>
+          <p:cNvPr id="2" name="deckgen:decor"/>
           <p:cNvSpPr/>
           <p:nvPr/>
         </p:nvSpPr>
@@ -8107,7 +9251,7 @@
       </p:sp>
       <p:sp>
         <p:nvSpPr>
-          <p:cNvPr id="3" name="Oval 2"/>
+          <p:cNvPr id="3" name="deckgen:decor"/>
           <p:cNvSpPr/>
           <p:nvPr/>
         </p:nvSpPr>
@@ -8137,7 +9281,7 @@
       </p:sp>
       <p:sp>
         <p:nvSpPr>
-          <p:cNvPr id="4" name="Oval 3"/>
+          <p:cNvPr id="4" name="deckgen:decor"/>
           <p:cNvSpPr/>
           <p:nvPr/>
         </p:nvSpPr>
@@ -8343,7 +9487,7 @@
       </p:sp>
       <p:sp>
         <p:nvSpPr>
-          <p:cNvPr id="10" name="TextBox 9"/>
+          <p:cNvPr id="10" name="deckgen:ornament"/>
           <p:cNvSpPr txBox="1"/>
           <p:nvPr/>
         </p:nvSpPr>
@@ -8528,7 +9672,7 @@
       </p:sp>
       <p:sp>
         <p:nvSpPr>
-          <p:cNvPr id="14" name="TextBox 13"/>
+          <p:cNvPr id="14" name="deckgen:ornament"/>
           <p:cNvSpPr txBox="1"/>
           <p:nvPr/>
         </p:nvSpPr>
@@ -8713,7 +9857,7 @@
       </p:sp>
       <p:sp>
         <p:nvSpPr>
-          <p:cNvPr id="18" name="TextBox 17"/>
+          <p:cNvPr id="18" name="deckgen:ornament"/>
           <p:cNvSpPr txBox="1"/>
           <p:nvPr/>
         </p:nvSpPr>
@@ -8898,7 +10042,7 @@
       </p:sp>
       <p:sp>
         <p:nvSpPr>
-          <p:cNvPr id="22" name="TextBox 21"/>
+          <p:cNvPr id="22" name="deckgen:ornament"/>
           <p:cNvSpPr txBox="1"/>
           <p:nvPr/>
         </p:nvSpPr>
@@ -9220,7 +10364,7 @@
       <p:grpSpPr/>
       <p:sp>
         <p:nvSpPr>
-          <p:cNvPr id="2" name="Oval 1"/>
+          <p:cNvPr id="2" name="deckgen:decor"/>
           <p:cNvSpPr/>
           <p:nvPr/>
         </p:nvSpPr>
@@ -9250,7 +10394,7 @@
       </p:sp>
       <p:sp>
         <p:nvSpPr>
-          <p:cNvPr id="3" name="Oval 2"/>
+          <p:cNvPr id="3" name="deckgen:decor"/>
           <p:cNvSpPr/>
           <p:nvPr/>
         </p:nvSpPr>
@@ -9280,7 +10424,7 @@
       </p:sp>
       <p:sp>
         <p:nvSpPr>
-          <p:cNvPr id="4" name="Oval 3"/>
+          <p:cNvPr id="4" name="deckgen:decor"/>
           <p:cNvSpPr/>
           <p:nvPr/>
         </p:nvSpPr>
@@ -9707,7 +10851,7 @@
                 <a:ea typeface="Pretendard"/>
                 <a:cs typeface="Pretendard"/>
               </a:rPr>
-              <a:t>Parquet·CSV 끼리 JOIN 하는 분석 질의를 작성했다</a:t>
+              <a:t>Parquet·CSV 끼리 JOIN 하고 Pandas 결과와 교차 검증했다</a:t>
             </a:r>
           </a:p>
         </p:txBody>
@@ -9853,7 +10997,7 @@
                 <a:ea typeface="Pretendard"/>
                 <a:cs typeface="Pretendard"/>
               </a:rPr>
-              <a:t>SQL 결과와 Pandas 결과를 대조해 교차 검증했다</a:t>
+              <a:t>CTE 로 단계를 나누고 중간 결과를 따로 확인했다</a:t>
             </a:r>
           </a:p>
         </p:txBody>
@@ -9999,7 +11143,7 @@
                 <a:ea typeface="Pretendard"/>
                 <a:cs typeface="Pretendard"/>
               </a:rPr>
-              <a:t>CTE 로 단계를 나누고 중간 결과를 따로 확인했다</a:t>
+              <a:t>rank + QUALIFY 로 그룹별 상위 N 을 뽑고 CTE 로도 만들었다</a:t>
             </a:r>
           </a:p>
         </p:txBody>
@@ -10145,7 +11289,7 @@
                 <a:ea typeface="Pretendard"/>
                 <a:cs typeface="Pretendard"/>
               </a:rPr>
-              <a:t>PARTITION BY + rank + QUALIFY 로 그룹별 상위 N 을 뽑았다</a:t>
+              <a:t>rolling 과 윈도 프레임의 앞쪽 처리 차이를 확인했다</a:t>
             </a:r>
           </a:p>
         </p:txBody>
@@ -10291,7 +11435,7 @@
                 <a:ea typeface="Pretendard"/>
                 <a:cs typeface="Pretendard"/>
               </a:rPr>
-              <a:t>rolling 과 윈도 프레임의 앞쪽 처리 차이를 확인했다</a:t>
+              <a:t>SQL → Pandas → SQL 왕복으로 세그먼트 분석을 만들었다</a:t>
             </a:r>
           </a:p>
         </p:txBody>
@@ -10437,7 +11581,7 @@
                 <a:ea typeface="Pretendard"/>
                 <a:cs typeface="Pretendard"/>
               </a:rPr>
-              <a:t>.df() 로 받아 후처리하고 DataFrame 을 다시 SQL 로 질의했다</a:t>
+              <a:t>줄이기 전·후 .df() 의 시간·메모리 차이를 실측했다</a:t>
             </a:r>
           </a:p>
         </p:txBody>
@@ -10583,7 +11727,7 @@
                 <a:ea typeface="Pretendard"/>
                 <a:cs typeface="Pretendard"/>
               </a:rPr>
-              <a:t>줄이기 전·후 .df() 의 시간·메모리 차이를 실측했다</a:t>
+              <a:t>WHERE 윈도 함수 실패와 눈대중 경계의 전원 S 를 직접 봤다</a:t>
             </a:r>
           </a:p>
         </p:txBody>
@@ -10720,7 +11864,7 @@
       <p:grpSpPr/>
       <p:sp>
         <p:nvSpPr>
-          <p:cNvPr id="2" name="Oval 1"/>
+          <p:cNvPr id="2" name="deckgen:decor"/>
           <p:cNvSpPr/>
           <p:nvPr/>
         </p:nvSpPr>
@@ -10750,7 +11894,7 @@
       </p:sp>
       <p:sp>
         <p:nvSpPr>
-          <p:cNvPr id="3" name="Oval 2"/>
+          <p:cNvPr id="3" name="deckgen:decor"/>
           <p:cNvSpPr/>
           <p:nvPr/>
         </p:nvSpPr>
@@ -10780,7 +11924,7 @@
       </p:sp>
       <p:sp>
         <p:nvSpPr>
-          <p:cNvPr id="4" name="Oval 3"/>
+          <p:cNvPr id="4" name="deckgen:decor"/>
           <p:cNvSpPr/>
           <p:nvPr/>
         </p:nvSpPr>
@@ -11221,7 +12365,7 @@
                 <a:ea typeface="Pretendard"/>
                 <a:cs typeface="Pretendard"/>
               </a:rPr>
-              <a:t>WHERE 가 별칭을 못 찾음</a:t>
+              <a:t>WHERE 에 윈도 함수</a:t>
             </a:r>
           </a:p>
         </p:txBody>
@@ -11296,7 +12440,7 @@
                 <a:ea typeface="Pretendard"/>
                 <a:cs typeface="Pretendard"/>
               </a:rPr>
-              <a:t>WHERE 가 SELECT 보다</a:t>
+              <a:t>WHERE 는 윈도 함수</a:t>
             </a:r>
           </a:p>
           <a:p>
@@ -11314,7 +12458,7 @@
                 <a:ea typeface="Pretendard"/>
                 <a:cs typeface="Pretendard"/>
               </a:rPr>
-              <a:t>먼저 평가된다</a:t>
+              <a:t>계산 전에 행을 거른다</a:t>
             </a:r>
           </a:p>
         </p:txBody>
@@ -11389,7 +12533,7 @@
                 <a:ea typeface="Pretendard"/>
                 <a:cs typeface="Pretendard"/>
               </a:rPr>
-              <a:t>원래 식을 다시 적거나 CTE</a:t>
+              <a:t>QUALIFY 로 거르거나</a:t>
             </a:r>
           </a:p>
           <a:p>
@@ -11407,7 +12551,7 @@
                 <a:ea typeface="Pretendard"/>
                 <a:cs typeface="Pretendard"/>
               </a:rPr>
-              <a:t>윈도 결과는 QUALIFY</a:t>
+              <a:t>CTE 로 감싸고 WHERE</a:t>
             </a:r>
           </a:p>
         </p:txBody>
@@ -12285,7 +13429,7 @@
                 <a:ea typeface="Pretendard"/>
                 <a:cs typeface="Pretendard"/>
               </a:rPr>
-              <a:t>변환은 항상 「작아진 다음」 — 오늘 가장 많이 나온 규칙</a:t>
+              <a:t>첫 줄은 1.5H 5단계에서 일부러 낸 오류 · 변환은 항상 「작아진 다음」</a:t>
             </a:r>
           </a:p>
         </p:txBody>
@@ -12422,7 +13566,7 @@
       <p:grpSpPr/>
       <p:sp>
         <p:nvSpPr>
-          <p:cNvPr id="2" name="Oval 1"/>
+          <p:cNvPr id="2" name="deckgen:decor"/>
           <p:cNvSpPr/>
           <p:nvPr/>
         </p:nvSpPr>
@@ -12452,7 +13596,7 @@
       </p:sp>
       <p:sp>
         <p:nvSpPr>
-          <p:cNvPr id="3" name="Oval 2"/>
+          <p:cNvPr id="3" name="deckgen:decor"/>
           <p:cNvSpPr/>
           <p:nvPr/>
         </p:nvSpPr>
@@ -12482,7 +13626,7 @@
       </p:sp>
       <p:sp>
         <p:nvSpPr>
-          <p:cNvPr id="4" name="Oval 3"/>
+          <p:cNvPr id="4" name="deckgen:decor"/>
           <p:cNvSpPr/>
           <p:nvPr/>
         </p:nvSpPr>
@@ -13542,7 +14686,7 @@
       <p:grpSpPr/>
       <p:sp>
         <p:nvSpPr>
-          <p:cNvPr id="2" name="Oval 1"/>
+          <p:cNvPr id="2" name="deckgen:decor"/>
           <p:cNvSpPr/>
           <p:nvPr/>
         </p:nvSpPr>
@@ -13572,7 +14716,7 @@
       </p:sp>
       <p:sp>
         <p:nvSpPr>
-          <p:cNvPr id="3" name="Oval 2"/>
+          <p:cNvPr id="3" name="deckgen:decor"/>
           <p:cNvSpPr/>
           <p:nvPr/>
         </p:nvSpPr>
@@ -13602,7 +14746,7 @@
       </p:sp>
       <p:sp>
         <p:nvSpPr>
-          <p:cNvPr id="4" name="Oval 3"/>
+          <p:cNvPr id="4" name="deckgen:decor"/>
           <p:cNvSpPr/>
           <p:nvPr/>
         </p:nvSpPr>
@@ -13666,7 +14810,7 @@
                 <a:ea typeface="Pretendard"/>
                 <a:cs typeface="Pretendard"/>
               </a:rPr>
-              <a:t>다음 회차 예고</a:t>
+              <a:t>다음 차시(3-5) 준비</a:t>
             </a:r>
           </a:p>
         </p:txBody>
@@ -13707,7 +14851,7 @@
                 <a:ea typeface="Pretendard"/>
                 <a:cs typeface="Pretendard"/>
               </a:rPr>
-              <a:t>3-5 · Pandas와 DuckDB를 이용한 하이브리드 가공</a:t>
+              <a:t>원본 orders.csv 가 그대로인지 확인</a:t>
             </a:r>
           </a:p>
         </p:txBody>
@@ -13750,12 +14894,12 @@
         </p:nvSpPr>
         <p:spPr>
           <a:xfrm>
-            <a:off x="1143000" y="3429000"/>
-            <a:ext cx="3714750" cy="2476500"/>
+            <a:off x="1143000" y="2933700"/>
+            <a:ext cx="11430000" cy="1095375"/>
           </a:xfrm>
           <a:prstGeom prst="roundRect">
             <a:avLst>
-              <a:gd name="adj" fmla="val 1923"/>
+              <a:gd name="adj" fmla="val 4347"/>
             </a:avLst>
           </a:prstGeom>
           <a:solidFill>
@@ -13778,20 +14922,20 @@
       </p:sp>
       <p:sp>
         <p:nvSpPr>
-          <p:cNvPr id="9" name="Rectangle 8"/>
-          <p:cNvSpPr/>
-          <p:nvPr/>
-        </p:nvSpPr>
-        <p:spPr>
-          <a:xfrm>
-            <a:off x="1143000" y="3429000"/>
-            <a:ext cx="3714750" cy="47625"/>
-          </a:xfrm>
-          <a:prstGeom prst="rect">
-            <a:avLst/>
-          </a:prstGeom>
-          <a:solidFill>
-            <a:srgbClr val="1E5BC6"/>
+          <p:cNvPr id="9" name="Oval 8"/>
+          <p:cNvSpPr/>
+          <p:nvPr/>
+        </p:nvSpPr>
+        <p:spPr>
+          <a:xfrm>
+            <a:off x="1447800" y="3181350"/>
+            <a:ext cx="590550" cy="590550"/>
+          </a:xfrm>
+          <a:prstGeom prst="ellipse">
+            <a:avLst/>
+          </a:prstGeom>
+          <a:solidFill>
+            <a:srgbClr val="0D2B5E"/>
           </a:solidFill>
           <a:ln>
             <a:noFill/>
@@ -13814,8 +14958,8 @@
         </p:nvSpPr>
         <p:spPr>
           <a:xfrm>
-            <a:off x="4000500" y="3638550"/>
-            <a:ext cx="590550" cy="400050"/>
+            <a:off x="1447800" y="3333750"/>
+            <a:ext cx="590550" cy="323850"/>
           </a:xfrm>
           <a:prstGeom prst="rect">
             <a:avLst/>
@@ -13828,21 +14972,21 @@
           </a:bodyPr>
           <a:lstStyle/>
           <a:p>
-            <a:pPr algn="r">
+            <a:pPr algn="ctr">
               <a:lnSpc>
                 <a:spcPct val="100000"/>
               </a:lnSpc>
             </a:pPr>
             <a:r>
-              <a:rPr sz="2550" b="1">
-                <a:solidFill>
-                  <a:srgbClr val="E4EBF4"/>
-                </a:solidFill>
-                <a:latin typeface="Pretendard"/>
-                <a:ea typeface="Pretendard"/>
-                <a:cs typeface="Pretendard"/>
-              </a:rPr>
-              <a:t>01</a:t>
+              <a:rPr sz="2250" b="1">
+                <a:solidFill>
+                  <a:srgbClr val="FFFFFF"/>
+                </a:solidFill>
+                <a:latin typeface="Pretendard"/>
+                <a:ea typeface="Pretendard"/>
+                <a:cs typeface="Pretendard"/>
+              </a:rPr>
+              <a:t>1</a:t>
             </a:r>
           </a:p>
         </p:txBody>
@@ -13855,8 +14999,8 @@
         </p:nvSpPr>
         <p:spPr>
           <a:xfrm>
-            <a:off x="1466850" y="3752850"/>
-            <a:ext cx="3067050" cy="1828800"/>
+            <a:off x="2324100" y="3143250"/>
+            <a:ext cx="9906000" cy="400050"/>
           </a:xfrm>
           <a:prstGeom prst="rect">
             <a:avLst/>
@@ -13864,18 +15008,18 @@
           <a:noFill/>
         </p:spPr>
         <p:txBody>
-          <a:bodyPr wrap="square" lIns="0" rIns="0" tIns="0" bIns="0" anchor="ctr">
+          <a:bodyPr wrap="square" lIns="0" rIns="0" tIns="0" bIns="0" anchor="t">
             <a:spAutoFit/>
           </a:bodyPr>
           <a:lstStyle/>
           <a:p>
-            <a:pPr>
-              <a:lnSpc>
-                <a:spcPct val="115000"/>
-              </a:lnSpc>
-            </a:pPr>
-            <a:r>
-              <a:rPr sz="2700" b="1">
+            <a:pPr algn="l">
+              <a:lnSpc>
+                <a:spcPct val="110000"/>
+              </a:lnSpc>
+            </a:pPr>
+            <a:r>
+              <a:rPr sz="2475" b="1">
                 <a:solidFill>
                   <a:srgbClr val="0D2B5E"/>
                 </a:solidFill>
@@ -13883,17 +15027,37 @@
                 <a:ea typeface="Pretendard"/>
                 <a:cs typeface="Pretendard"/>
               </a:rPr>
-              <a:t>이론 1H</a:t>
-            </a:r>
-          </a:p>
-          <a:p>
-            <a:pPr>
-              <a:lnSpc>
-                <a:spcPct val="146000"/>
-              </a:lnSpc>
-              <a:spcBef>
-                <a:spcPts val="1050"/>
-              </a:spcBef>
+              <a:t>cd ~/data-eng/week3</a:t>
+            </a:r>
+          </a:p>
+        </p:txBody>
+      </p:sp>
+      <p:sp>
+        <p:nvSpPr>
+          <p:cNvPr id="12" name="TextBox 11"/>
+          <p:cNvSpPr txBox="1"/>
+          <p:nvPr/>
+        </p:nvSpPr>
+        <p:spPr>
+          <a:xfrm>
+            <a:off x="2324100" y="3543300"/>
+            <a:ext cx="9906000" cy="361950"/>
+          </a:xfrm>
+          <a:prstGeom prst="rect">
+            <a:avLst/>
+          </a:prstGeom>
+          <a:noFill/>
+        </p:spPr>
+        <p:txBody>
+          <a:bodyPr wrap="square" lIns="0" rIns="0" tIns="0" bIns="0" anchor="t">
+            <a:spAutoFit/>
+          </a:bodyPr>
+          <a:lstStyle/>
+          <a:p>
+            <a:pPr algn="l">
+              <a:lnSpc>
+                <a:spcPct val="120000"/>
+              </a:lnSpc>
             </a:pPr>
             <a:r>
               <a:rPr sz="2025" b="0">
@@ -13904,43 +15068,25 @@
                 <a:ea typeface="Pretendard"/>
                 <a:cs typeface="Pretendard"/>
               </a:rPr>
-              <a:t>하이브리드 설계</a:t>
-            </a:r>
-          </a:p>
-          <a:p>
-            <a:pPr>
-              <a:lnSpc>
-                <a:spcPct val="146000"/>
-              </a:lnSpc>
-            </a:pPr>
-            <a:r>
-              <a:rPr sz="2025" b="0">
-                <a:solidFill>
-                  <a:srgbClr val="3D3D3D"/>
-                </a:solidFill>
-                <a:latin typeface="Pretendard"/>
-                <a:ea typeface="Pretendard"/>
-                <a:cs typeface="Pretendard"/>
-              </a:rPr>
-              <a:t>역할 분담·품질 항목</a:t>
-            </a:r>
-          </a:p>
-        </p:txBody>
-      </p:sp>
-      <p:sp>
-        <p:nvSpPr>
-          <p:cNvPr id="12" name="Rounded Rectangle 11"/>
-          <p:cNvSpPr/>
-          <p:nvPr/>
-        </p:nvSpPr>
-        <p:spPr>
-          <a:xfrm>
-            <a:off x="5238750" y="3429000"/>
-            <a:ext cx="3714750" cy="2476500"/>
+              <a:t>3-1 의 orders.csv — 결측·공백·중복을 일부러 심어 둔 원본</a:t>
+            </a:r>
+          </a:p>
+        </p:txBody>
+      </p:sp>
+      <p:sp>
+        <p:nvSpPr>
+          <p:cNvPr id="13" name="Rounded Rectangle 12"/>
+          <p:cNvSpPr/>
+          <p:nvPr/>
+        </p:nvSpPr>
+        <p:spPr>
+          <a:xfrm>
+            <a:off x="1143000" y="4200525"/>
+            <a:ext cx="11430000" cy="1095375"/>
           </a:xfrm>
           <a:prstGeom prst="roundRect">
             <a:avLst>
-              <a:gd name="adj" fmla="val 1923"/>
+              <a:gd name="adj" fmla="val 4347"/>
             </a:avLst>
           </a:prstGeom>
           <a:solidFill>
@@ -13963,20 +15109,20 @@
       </p:sp>
       <p:sp>
         <p:nvSpPr>
-          <p:cNvPr id="13" name="Rectangle 12"/>
-          <p:cNvSpPr/>
-          <p:nvPr/>
-        </p:nvSpPr>
-        <p:spPr>
-          <a:xfrm>
-            <a:off x="5238750" y="3429000"/>
-            <a:ext cx="3714750" cy="47625"/>
-          </a:xfrm>
-          <a:prstGeom prst="rect">
-            <a:avLst/>
-          </a:prstGeom>
-          <a:solidFill>
-            <a:srgbClr val="1E5BC6"/>
+          <p:cNvPr id="14" name="Oval 13"/>
+          <p:cNvSpPr/>
+          <p:nvPr/>
+        </p:nvSpPr>
+        <p:spPr>
+          <a:xfrm>
+            <a:off x="1447800" y="4448175"/>
+            <a:ext cx="590550" cy="590550"/>
+          </a:xfrm>
+          <a:prstGeom prst="ellipse">
+            <a:avLst/>
+          </a:prstGeom>
+          <a:solidFill>
+            <a:srgbClr val="0D2B5E"/>
           </a:solidFill>
           <a:ln>
             <a:noFill/>
@@ -13993,14 +15139,14 @@
       </p:sp>
       <p:sp>
         <p:nvSpPr>
-          <p:cNvPr id="14" name="TextBox 13"/>
+          <p:cNvPr id="15" name="TextBox 14"/>
           <p:cNvSpPr txBox="1"/>
           <p:nvPr/>
         </p:nvSpPr>
         <p:spPr>
           <a:xfrm>
-            <a:off x="8096250" y="3638550"/>
-            <a:ext cx="590550" cy="400050"/>
+            <a:off x="1447800" y="4600575"/>
+            <a:ext cx="590550" cy="323850"/>
           </a:xfrm>
           <a:prstGeom prst="rect">
             <a:avLst/>
@@ -14013,35 +15159,35 @@
           </a:bodyPr>
           <a:lstStyle/>
           <a:p>
-            <a:pPr algn="r">
+            <a:pPr algn="ctr">
               <a:lnSpc>
                 <a:spcPct val="100000"/>
               </a:lnSpc>
             </a:pPr>
             <a:r>
-              <a:rPr sz="2550" b="1">
-                <a:solidFill>
-                  <a:srgbClr val="E4EBF4"/>
-                </a:solidFill>
-                <a:latin typeface="Pretendard"/>
-                <a:ea typeface="Pretendard"/>
-                <a:cs typeface="Pretendard"/>
-              </a:rPr>
-              <a:t>02</a:t>
-            </a:r>
-          </a:p>
-        </p:txBody>
-      </p:sp>
-      <p:sp>
-        <p:nvSpPr>
-          <p:cNvPr id="15" name="TextBox 14"/>
+              <a:rPr sz="2250" b="1">
+                <a:solidFill>
+                  <a:srgbClr val="FFFFFF"/>
+                </a:solidFill>
+                <a:latin typeface="Pretendard"/>
+                <a:ea typeface="Pretendard"/>
+                <a:cs typeface="Pretendard"/>
+              </a:rPr>
+              <a:t>2</a:t>
+            </a:r>
+          </a:p>
+        </p:txBody>
+      </p:sp>
+      <p:sp>
+        <p:nvSpPr>
+          <p:cNvPr id="16" name="TextBox 15"/>
           <p:cNvSpPr txBox="1"/>
           <p:nvPr/>
         </p:nvSpPr>
         <p:spPr>
           <a:xfrm>
-            <a:off x="5562600" y="3752850"/>
-            <a:ext cx="3067050" cy="1828800"/>
+            <a:off x="2324100" y="4410075"/>
+            <a:ext cx="9906000" cy="400050"/>
           </a:xfrm>
           <a:prstGeom prst="rect">
             <a:avLst/>
@@ -14049,18 +15195,18 @@
           <a:noFill/>
         </p:spPr>
         <p:txBody>
-          <a:bodyPr wrap="square" lIns="0" rIns="0" tIns="0" bIns="0" anchor="ctr">
+          <a:bodyPr wrap="square" lIns="0" rIns="0" tIns="0" bIns="0" anchor="t">
             <a:spAutoFit/>
           </a:bodyPr>
           <a:lstStyle/>
           <a:p>
-            <a:pPr>
-              <a:lnSpc>
-                <a:spcPct val="115000"/>
-              </a:lnSpc>
-            </a:pPr>
-            <a:r>
-              <a:rPr sz="2700" b="1">
+            <a:pPr algn="l">
+              <a:lnSpc>
+                <a:spcPct val="110000"/>
+              </a:lnSpc>
+            </a:pPr>
+            <a:r>
+              <a:rPr sz="2475" b="1">
                 <a:solidFill>
                   <a:srgbClr val="0D2B5E"/>
                 </a:solidFill>
@@ -14068,17 +15214,37 @@
                 <a:ea typeface="Pretendard"/>
                 <a:cs typeface="Pretendard"/>
               </a:rPr>
-              <a:t>실습 1.5H</a:t>
-            </a:r>
-          </a:p>
-          <a:p>
-            <a:pPr>
-              <a:lnSpc>
-                <a:spcPct val="146000"/>
-              </a:lnSpc>
-              <a:spcBef>
-                <a:spcPts val="1050"/>
-              </a:spcBef>
+              <a:t>ls -l make_orders.py orders.csv</a:t>
+            </a:r>
+          </a:p>
+        </p:txBody>
+      </p:sp>
+      <p:sp>
+        <p:nvSpPr>
+          <p:cNvPr id="17" name="TextBox 16"/>
+          <p:cNvSpPr txBox="1"/>
+          <p:nvPr/>
+        </p:nvSpPr>
+        <p:spPr>
+          <a:xfrm>
+            <a:off x="2324100" y="4810125"/>
+            <a:ext cx="9906000" cy="361950"/>
+          </a:xfrm>
+          <a:prstGeom prst="rect">
+            <a:avLst/>
+          </a:prstGeom>
+          <a:noFill/>
+        </p:spPr>
+        <p:txBody>
+          <a:bodyPr wrap="square" lIns="0" rIns="0" tIns="0" bIns="0" anchor="t">
+            <a:spAutoFit/>
+          </a:bodyPr>
+          <a:lstStyle/>
+          <a:p>
+            <a:pPr algn="l">
+              <a:lnSpc>
+                <a:spcPct val="120000"/>
+              </a:lnSpc>
             </a:pPr>
             <a:r>
               <a:rPr sz="2025" b="0">
@@ -14089,228 +15255,25 @@
                 <a:ea typeface="Pretendard"/>
                 <a:cs typeface="Pretendard"/>
               </a:rPr>
-              <a:t>정제 파이프라인</a:t>
-            </a:r>
-          </a:p>
-          <a:p>
-            <a:pPr>
-              <a:lnSpc>
-                <a:spcPct val="146000"/>
-              </a:lnSpc>
-            </a:pPr>
-            <a:r>
-              <a:rPr sz="2025" b="0">
-                <a:solidFill>
-                  <a:srgbClr val="3D3D3D"/>
-                </a:solidFill>
-                <a:latin typeface="Pretendard"/>
-                <a:ea typeface="Pretendard"/>
-                <a:cs typeface="Pretendard"/>
-              </a:rPr>
-              <a:t>함수 단위 구현</a:t>
-            </a:r>
-          </a:p>
-        </p:txBody>
-      </p:sp>
-      <p:sp>
-        <p:nvSpPr>
-          <p:cNvPr id="16" name="Rounded Rectangle 15"/>
-          <p:cNvSpPr/>
-          <p:nvPr/>
-        </p:nvSpPr>
-        <p:spPr>
-          <a:xfrm>
-            <a:off x="9334500" y="3429000"/>
-            <a:ext cx="3714750" cy="2476500"/>
+              <a:t>orders.csv 가 36244 bytes</a:t>
+            </a:r>
+          </a:p>
+        </p:txBody>
+      </p:sp>
+      <p:sp>
+        <p:nvSpPr>
+          <p:cNvPr id="18" name="Rounded Rectangle 17"/>
+          <p:cNvSpPr/>
+          <p:nvPr/>
+        </p:nvSpPr>
+        <p:spPr>
+          <a:xfrm>
+            <a:off x="1143000" y="5467350"/>
+            <a:ext cx="11430000" cy="1095375"/>
           </a:xfrm>
           <a:prstGeom prst="roundRect">
             <a:avLst>
-              <a:gd name="adj" fmla="val 1923"/>
-            </a:avLst>
-          </a:prstGeom>
-          <a:solidFill>
-            <a:srgbClr val="0D2B5E"/>
-          </a:solidFill>
-          <a:ln w="9525">
-            <a:solidFill>
-              <a:srgbClr val="0D2B5E"/>
-            </a:solidFill>
-          </a:ln>
-          <a:effectLst/>
-        </p:spPr>
-        <p:txBody>
-          <a:bodyPr rtlCol="0" anchor="ctr" wrap="square"/>
-          <a:lstStyle/>
-          <a:p>
-            <a:pPr algn="ctr"/>
-          </a:p>
-        </p:txBody>
-      </p:sp>
-      <p:sp>
-        <p:nvSpPr>
-          <p:cNvPr id="17" name="Rectangle 16"/>
-          <p:cNvSpPr/>
-          <p:nvPr/>
-        </p:nvSpPr>
-        <p:spPr>
-          <a:xfrm>
-            <a:off x="9334500" y="3429000"/>
-            <a:ext cx="3714750" cy="47625"/>
-          </a:xfrm>
-          <a:prstGeom prst="rect">
-            <a:avLst/>
-          </a:prstGeom>
-          <a:solidFill>
-            <a:srgbClr val="1E5BC6"/>
-          </a:solidFill>
-          <a:ln>
-            <a:noFill/>
-          </a:ln>
-          <a:effectLst/>
-        </p:spPr>
-        <p:txBody>
-          <a:bodyPr rtlCol="0" anchor="ctr" wrap="square"/>
-          <a:lstStyle/>
-          <a:p>
-            <a:pPr algn="ctr"/>
-          </a:p>
-        </p:txBody>
-      </p:sp>
-      <p:sp>
-        <p:nvSpPr>
-          <p:cNvPr id="18" name="TextBox 17"/>
-          <p:cNvSpPr txBox="1"/>
-          <p:nvPr/>
-        </p:nvSpPr>
-        <p:spPr>
-          <a:xfrm>
-            <a:off x="12192000" y="3638550"/>
-            <a:ext cx="590550" cy="400050"/>
-          </a:xfrm>
-          <a:prstGeom prst="rect">
-            <a:avLst/>
-          </a:prstGeom>
-          <a:noFill/>
-        </p:spPr>
-        <p:txBody>
-          <a:bodyPr wrap="square" lIns="0" rIns="0" tIns="0" bIns="0" anchor="t">
-            <a:spAutoFit/>
-          </a:bodyPr>
-          <a:lstStyle/>
-          <a:p>
-            <a:pPr algn="r">
-              <a:lnSpc>
-                <a:spcPct val="100000"/>
-              </a:lnSpc>
-            </a:pPr>
-            <a:r>
-              <a:rPr sz="2550" b="1">
-                <a:solidFill>
-                  <a:srgbClr val="3B4B7C"/>
-                </a:solidFill>
-                <a:latin typeface="Pretendard"/>
-                <a:ea typeface="Pretendard"/>
-                <a:cs typeface="Pretendard"/>
-              </a:rPr>
-              <a:t>03</a:t>
-            </a:r>
-          </a:p>
-        </p:txBody>
-      </p:sp>
-      <p:sp>
-        <p:nvSpPr>
-          <p:cNvPr id="19" name="TextBox 18"/>
-          <p:cNvSpPr txBox="1"/>
-          <p:nvPr/>
-        </p:nvSpPr>
-        <p:spPr>
-          <a:xfrm>
-            <a:off x="9658350" y="3752850"/>
-            <a:ext cx="3067050" cy="1828800"/>
-          </a:xfrm>
-          <a:prstGeom prst="rect">
-            <a:avLst/>
-          </a:prstGeom>
-          <a:noFill/>
-        </p:spPr>
-        <p:txBody>
-          <a:bodyPr wrap="square" lIns="0" rIns="0" tIns="0" bIns="0" anchor="ctr">
-            <a:spAutoFit/>
-          </a:bodyPr>
-          <a:lstStyle/>
-          <a:p>
-            <a:pPr>
-              <a:lnSpc>
-                <a:spcPct val="115000"/>
-              </a:lnSpc>
-            </a:pPr>
-            <a:r>
-              <a:rPr sz="2700" b="1">
-                <a:solidFill>
-                  <a:srgbClr val="FFFFFF"/>
-                </a:solidFill>
-                <a:latin typeface="Pretendard"/>
-                <a:ea typeface="Pretendard"/>
-                <a:cs typeface="Pretendard"/>
-              </a:rPr>
-              <a:t>실습 1H</a:t>
-            </a:r>
-          </a:p>
-          <a:p>
-            <a:pPr>
-              <a:lnSpc>
-                <a:spcPct val="146000"/>
-              </a:lnSpc>
-              <a:spcBef>
-                <a:spcPts val="1050"/>
-              </a:spcBef>
-            </a:pPr>
-            <a:r>
-              <a:rPr sz="2025" b="0">
-                <a:solidFill>
-                  <a:srgbClr val="D9E2F0"/>
-                </a:solidFill>
-                <a:latin typeface="Pretendard"/>
-                <a:ea typeface="Pretendard"/>
-                <a:cs typeface="Pretendard"/>
-              </a:rPr>
-              <a:t>품질 리포트 작성</a:t>
-            </a:r>
-          </a:p>
-          <a:p>
-            <a:pPr>
-              <a:lnSpc>
-                <a:spcPct val="146000"/>
-              </a:lnSpc>
-            </a:pPr>
-            <a:r>
-              <a:rPr sz="2025" b="0">
-                <a:solidFill>
-                  <a:srgbClr val="D9E2F0"/>
-                </a:solidFill>
-                <a:latin typeface="Pretendard"/>
-                <a:ea typeface="Pretendard"/>
-                <a:cs typeface="Pretendard"/>
-              </a:rPr>
-              <a:t>주차 산출물 제출</a:t>
-            </a:r>
-          </a:p>
-        </p:txBody>
-      </p:sp>
-      <p:sp>
-        <p:nvSpPr>
-          <p:cNvPr id="20" name="Rounded Rectangle 19"/>
-          <p:cNvSpPr/>
-          <p:nvPr/>
-        </p:nvSpPr>
-        <p:spPr>
-          <a:xfrm>
-            <a:off x="13430250" y="3429000"/>
-            <a:ext cx="3714750" cy="2476500"/>
-          </a:xfrm>
-          <a:prstGeom prst="roundRect">
-            <a:avLst>
-              <a:gd name="adj" fmla="val 1923"/>
+              <a:gd name="adj" fmla="val 4347"/>
             </a:avLst>
           </a:prstGeom>
           <a:solidFill>
@@ -14333,20 +15296,20 @@
       </p:sp>
       <p:sp>
         <p:nvSpPr>
-          <p:cNvPr id="21" name="Rectangle 20"/>
-          <p:cNvSpPr/>
-          <p:nvPr/>
-        </p:nvSpPr>
-        <p:spPr>
-          <a:xfrm>
-            <a:off x="13430250" y="3429000"/>
-            <a:ext cx="3714750" cy="47625"/>
-          </a:xfrm>
-          <a:prstGeom prst="rect">
-            <a:avLst/>
-          </a:prstGeom>
-          <a:solidFill>
-            <a:srgbClr val="1E5BC6"/>
+          <p:cNvPr id="19" name="Oval 18"/>
+          <p:cNvSpPr/>
+          <p:nvPr/>
+        </p:nvSpPr>
+        <p:spPr>
+          <a:xfrm>
+            <a:off x="1447800" y="5715000"/>
+            <a:ext cx="590550" cy="590550"/>
+          </a:xfrm>
+          <a:prstGeom prst="ellipse">
+            <a:avLst/>
+          </a:prstGeom>
+          <a:solidFill>
+            <a:srgbClr val="0D2B5E"/>
           </a:solidFill>
           <a:ln>
             <a:noFill/>
@@ -14363,14 +15326,96 @@
       </p:sp>
       <p:sp>
         <p:nvSpPr>
+          <p:cNvPr id="20" name="TextBox 19"/>
+          <p:cNvSpPr txBox="1"/>
+          <p:nvPr/>
+        </p:nvSpPr>
+        <p:spPr>
+          <a:xfrm>
+            <a:off x="1447800" y="5867400"/>
+            <a:ext cx="590550" cy="323850"/>
+          </a:xfrm>
+          <a:prstGeom prst="rect">
+            <a:avLst/>
+          </a:prstGeom>
+          <a:noFill/>
+        </p:spPr>
+        <p:txBody>
+          <a:bodyPr wrap="square" lIns="0" rIns="0" tIns="0" bIns="0" anchor="t">
+            <a:spAutoFit/>
+          </a:bodyPr>
+          <a:lstStyle/>
+          <a:p>
+            <a:pPr algn="ctr">
+              <a:lnSpc>
+                <a:spcPct val="100000"/>
+              </a:lnSpc>
+            </a:pPr>
+            <a:r>
+              <a:rPr sz="2250" b="1">
+                <a:solidFill>
+                  <a:srgbClr val="FFFFFF"/>
+                </a:solidFill>
+                <a:latin typeface="Pretendard"/>
+                <a:ea typeface="Pretendard"/>
+                <a:cs typeface="Pretendard"/>
+              </a:rPr>
+              <a:t>3</a:t>
+            </a:r>
+          </a:p>
+        </p:txBody>
+      </p:sp>
+      <p:sp>
+        <p:nvSpPr>
+          <p:cNvPr id="21" name="TextBox 20"/>
+          <p:cNvSpPr txBox="1"/>
+          <p:nvPr/>
+        </p:nvSpPr>
+        <p:spPr>
+          <a:xfrm>
+            <a:off x="2324100" y="5676900"/>
+            <a:ext cx="9906000" cy="400050"/>
+          </a:xfrm>
+          <a:prstGeom prst="rect">
+            <a:avLst/>
+          </a:prstGeom>
+          <a:noFill/>
+        </p:spPr>
+        <p:txBody>
+          <a:bodyPr wrap="square" lIns="0" rIns="0" tIns="0" bIns="0" anchor="t">
+            <a:spAutoFit/>
+          </a:bodyPr>
+          <a:lstStyle/>
+          <a:p>
+            <a:pPr algn="l">
+              <a:lnSpc>
+                <a:spcPct val="110000"/>
+              </a:lnSpc>
+            </a:pPr>
+            <a:r>
+              <a:rPr sz="2475" b="1">
+                <a:solidFill>
+                  <a:srgbClr val="0D2B5E"/>
+                </a:solidFill>
+                <a:latin typeface="Pretendard"/>
+                <a:ea typeface="Pretendard"/>
+                <a:cs typeface="Pretendard"/>
+              </a:rPr>
+              <a:t>wc -l orders.csv</a:t>
+            </a:r>
+          </a:p>
+        </p:txBody>
+      </p:sp>
+      <p:sp>
+        <p:nvSpPr>
           <p:cNvPr id="22" name="TextBox 21"/>
           <p:cNvSpPr txBox="1"/>
           <p:nvPr/>
         </p:nvSpPr>
         <p:spPr>
           <a:xfrm>
-            <a:off x="16287750" y="3638550"/>
-            <a:ext cx="590550" cy="400050"/>
+            <a:off x="2324100" y="6076950"/>
+            <a:ext cx="9906000" cy="361950"/>
           </a:xfrm>
           <a:prstGeom prst="rect">
             <a:avLst/>
@@ -14383,35 +15428,110 @@
           </a:bodyPr>
           <a:lstStyle/>
           <a:p>
-            <a:pPr algn="r">
+            <a:pPr algn="l">
+              <a:lnSpc>
+                <a:spcPct val="120000"/>
+              </a:lnSpc>
+            </a:pPr>
+            <a:r>
+              <a:rPr sz="2025" b="0">
+                <a:solidFill>
+                  <a:srgbClr val="3D3D3D"/>
+                </a:solidFill>
+                <a:latin typeface="Pretendard"/>
+                <a:ea typeface="Pretendard"/>
+                <a:cs typeface="Pretendard"/>
+              </a:rPr>
+              <a:t>1016 줄(머리글 1 + 1015행)</a:t>
+            </a:r>
+          </a:p>
+        </p:txBody>
+      </p:sp>
+      <p:sp>
+        <p:nvSpPr>
+          <p:cNvPr id="23" name="Rounded Rectangle 22"/>
+          <p:cNvSpPr/>
+          <p:nvPr/>
+        </p:nvSpPr>
+        <p:spPr>
+          <a:xfrm>
+            <a:off x="13144500" y="2933700"/>
+            <a:ext cx="4000500" cy="3629025"/>
+          </a:xfrm>
+          <a:prstGeom prst="roundRect">
+            <a:avLst>
+              <a:gd name="adj" fmla="val 1312"/>
+            </a:avLst>
+          </a:prstGeom>
+          <a:solidFill>
+            <a:srgbClr val="EDF3FD"/>
+          </a:solidFill>
+          <a:ln w="9525">
+            <a:solidFill>
+              <a:srgbClr val="BFD3F5"/>
+            </a:solidFill>
+          </a:ln>
+          <a:effectLst/>
+        </p:spPr>
+        <p:txBody>
+          <a:bodyPr rtlCol="0" anchor="ctr" wrap="square"/>
+          <a:lstStyle/>
+          <a:p>
+            <a:pPr algn="ctr"/>
+          </a:p>
+        </p:txBody>
+      </p:sp>
+      <p:sp>
+        <p:nvSpPr>
+          <p:cNvPr id="24" name="TextBox 23"/>
+          <p:cNvSpPr txBox="1"/>
+          <p:nvPr/>
+        </p:nvSpPr>
+        <p:spPr>
+          <a:xfrm>
+            <a:off x="13487400" y="3929062"/>
+            <a:ext cx="3314700" cy="304800"/>
+          </a:xfrm>
+          <a:prstGeom prst="rect">
+            <a:avLst/>
+          </a:prstGeom>
+          <a:noFill/>
+        </p:spPr>
+        <p:txBody>
+          <a:bodyPr wrap="square" lIns="0" rIns="0" tIns="0" bIns="0" anchor="t">
+            <a:spAutoFit/>
+          </a:bodyPr>
+          <a:lstStyle/>
+          <a:p>
+            <a:pPr algn="l">
               <a:lnSpc>
                 <a:spcPct val="100000"/>
               </a:lnSpc>
             </a:pPr>
             <a:r>
-              <a:rPr sz="2550" b="1">
-                <a:solidFill>
-                  <a:srgbClr val="E4EBF4"/>
-                </a:solidFill>
-                <a:latin typeface="Pretendard"/>
-                <a:ea typeface="Pretendard"/>
-                <a:cs typeface="Pretendard"/>
-              </a:rPr>
-              <a:t>04</a:t>
-            </a:r>
-          </a:p>
-        </p:txBody>
-      </p:sp>
-      <p:sp>
-        <p:nvSpPr>
-          <p:cNvPr id="23" name="TextBox 22"/>
+              <a:rPr sz="1800" b="1" spc="190">
+                <a:solidFill>
+                  <a:srgbClr val="1E5BC6"/>
+                </a:solidFill>
+                <a:latin typeface="Pretendard"/>
+                <a:ea typeface="Pretendard"/>
+                <a:cs typeface="Pretendard"/>
+              </a:rPr>
+              <a:t>없으면</a:t>
+            </a:r>
+          </a:p>
+        </p:txBody>
+      </p:sp>
+      <p:sp>
+        <p:nvSpPr>
+          <p:cNvPr id="25" name="TextBox 24"/>
           <p:cNvSpPr txBox="1"/>
           <p:nvPr/>
         </p:nvSpPr>
         <p:spPr>
           <a:xfrm>
-            <a:off x="13754100" y="3752850"/>
-            <a:ext cx="3067050" cy="1828800"/>
+            <a:off x="13487400" y="4329112"/>
+            <a:ext cx="3314700" cy="1238250"/>
           </a:xfrm>
           <a:prstGeom prst="rect">
             <a:avLst/>
@@ -14419,14 +15539,14 @@
           <a:noFill/>
         </p:spPr>
         <p:txBody>
-          <a:bodyPr wrap="square" lIns="0" rIns="0" tIns="0" bIns="0" anchor="ctr">
+          <a:bodyPr wrap="square" lIns="0" rIns="0" tIns="0" bIns="0" anchor="t">
             <a:spAutoFit/>
           </a:bodyPr>
           <a:lstStyle/>
           <a:p>
-            <a:pPr>
-              <a:lnSpc>
-                <a:spcPct val="115000"/>
+            <a:pPr algn="l">
+              <a:lnSpc>
+                <a:spcPct val="138000"/>
               </a:lnSpc>
             </a:pPr>
             <a:r>
@@ -14438,66 +15558,45 @@
                 <a:ea typeface="Pretendard"/>
                 <a:cs typeface="Pretendard"/>
               </a:rPr>
-              <a:t>정리 0.5H</a:t>
-            </a:r>
-          </a:p>
-          <a:p>
-            <a:pPr>
-              <a:lnSpc>
-                <a:spcPct val="146000"/>
-              </a:lnSpc>
-              <a:spcBef>
-                <a:spcPts val="1050"/>
-              </a:spcBef>
-            </a:pPr>
-            <a:r>
-              <a:rPr sz="2025" b="0">
-                <a:solidFill>
-                  <a:srgbClr val="3D3D3D"/>
-                </a:solidFill>
-                <a:latin typeface="Pretendard"/>
-                <a:ea typeface="Pretendard"/>
-                <a:cs typeface="Pretendard"/>
-              </a:rPr>
-              <a:t>주차 회고</a:t>
-            </a:r>
-          </a:p>
-          <a:p>
-            <a:pPr>
-              <a:lnSpc>
-                <a:spcPct val="146000"/>
-              </a:lnSpc>
-            </a:pPr>
-            <a:r>
-              <a:rPr sz="2025" b="0">
-                <a:solidFill>
-                  <a:srgbClr val="3D3D3D"/>
-                </a:solidFill>
-                <a:latin typeface="Pretendard"/>
-                <a:ea typeface="Pretendard"/>
-                <a:cs typeface="Pretendard"/>
-              </a:rPr>
-              <a:t>산출물 점검</a:t>
-            </a:r>
-          </a:p>
-        </p:txBody>
-      </p:sp>
-      <p:sp>
-        <p:nvSpPr>
-          <p:cNvPr id="24" name="Rectangle 23"/>
-          <p:cNvSpPr/>
-          <p:nvPr/>
-        </p:nvSpPr>
-        <p:spPr>
-          <a:xfrm>
-            <a:off x="1143000" y="6496050"/>
-            <a:ext cx="47625" cy="723900"/>
-          </a:xfrm>
-          <a:prstGeom prst="rect">
-            <a:avLst/>
-          </a:prstGeom>
-          <a:solidFill>
-            <a:srgbClr val="1E5BC6"/>
+              <a:t>python3</a:t>
+            </a:r>
+          </a:p>
+          <a:p>
+            <a:pPr algn="l">
+              <a:lnSpc>
+                <a:spcPct val="138000"/>
+              </a:lnSpc>
+            </a:pPr>
+            <a:r>
+              <a:rPr sz="2700" b="1">
+                <a:solidFill>
+                  <a:srgbClr val="0D2B5E"/>
+                </a:solidFill>
+                <a:latin typeface="Pretendard"/>
+                <a:ea typeface="Pretendard"/>
+                <a:cs typeface="Pretendard"/>
+              </a:rPr>
+              <a:t>make_orders.py</a:t>
+            </a:r>
+          </a:p>
+        </p:txBody>
+      </p:sp>
+      <p:sp>
+        <p:nvSpPr>
+          <p:cNvPr id="26" name="Rectangle 25"/>
+          <p:cNvSpPr/>
+          <p:nvPr/>
+        </p:nvSpPr>
+        <p:spPr>
+          <a:xfrm>
+            <a:off x="1143000" y="7581900"/>
+            <a:ext cx="38100" cy="323850"/>
+          </a:xfrm>
+          <a:prstGeom prst="rect">
+            <a:avLst/>
+          </a:prstGeom>
+          <a:solidFill>
+            <a:srgbClr val="BFD3F5"/>
           </a:solidFill>
           <a:ln>
             <a:noFill/>
@@ -14514,14 +15613,14 @@
       </p:sp>
       <p:sp>
         <p:nvSpPr>
-          <p:cNvPr id="25" name="TextBox 24"/>
+          <p:cNvPr id="27" name="TextBox 26"/>
           <p:cNvSpPr txBox="1"/>
           <p:nvPr/>
         </p:nvSpPr>
         <p:spPr>
           <a:xfrm>
-            <a:off x="1390650" y="6553200"/>
-            <a:ext cx="15754350" cy="762000"/>
+            <a:off x="1314450" y="7581900"/>
+            <a:ext cx="15830550" cy="342900"/>
           </a:xfrm>
           <a:prstGeom prst="rect">
             <a:avLst/>
@@ -14536,11 +15635,11 @@
           <a:p>
             <a:pPr algn="l">
               <a:lnSpc>
-                <a:spcPct val="150000"/>
-              </a:lnSpc>
-            </a:pPr>
-            <a:r>
-              <a:rPr sz="2025" b="1">
+                <a:spcPct val="100000"/>
+              </a:lnSpc>
+            </a:pPr>
+            <a:r>
+              <a:rPr sz="1725" b="1">
                 <a:solidFill>
                   <a:srgbClr val="7D7D7D"/>
                 </a:solidFill>
@@ -14548,14 +15647,14 @@
                 <a:ea typeface="Pretendard"/>
                 <a:cs typeface="Pretendard"/>
               </a:rPr>
-              <a:t>준비: 3-1 의 orders.csv(결측 30·공백 20·중복 15 가 심어진 원본) — 없으면 make_orders.py 재실행(시드 고정)</a:t>
-            </a:r>
-          </a:p>
-        </p:txBody>
-      </p:sp>
-      <p:sp>
-        <p:nvSpPr>
-          <p:cNvPr id="26" name="Rectangle 25"/>
+              <a:t>시드 고정이라 다시 만들어도 같은 원본이 나온다</a:t>
+            </a:r>
+          </a:p>
+        </p:txBody>
+      </p:sp>
+      <p:sp>
+        <p:nvSpPr>
+          <p:cNvPr id="28" name="Rectangle 27"/>
           <p:cNvSpPr/>
           <p:nvPr/>
         </p:nvSpPr>
@@ -14585,7 +15684,7 @@
       </p:sp>
       <p:sp>
         <p:nvSpPr>
-          <p:cNvPr id="27" name="TextBox 26"/>
+          <p:cNvPr id="29" name="TextBox 28"/>
           <p:cNvSpPr txBox="1"/>
           <p:nvPr/>
         </p:nvSpPr>
@@ -14626,7 +15725,7 @@
       </p:sp>
       <p:sp>
         <p:nvSpPr>
-          <p:cNvPr id="28" name="TextBox 27"/>
+          <p:cNvPr id="30" name="TextBox 29"/>
           <p:cNvSpPr txBox="1"/>
           <p:nvPr/>
         </p:nvSpPr>
